--- a/docs/reports/台灣產業趨勢監測週報_2026-08-31_2026-09-07.pptx
+++ b/docs/reports/台灣產業趨勢監測週報_2026-08-31_2026-09-07.pptx
@@ -189,31 +189,31 @@
                   <c:v>99</c:v>
                 </c:pt>
                 <c:pt idx="2">
-                  <c:v>147</c:v>
+                  <c:v>152</c:v>
                 </c:pt>
                 <c:pt idx="3">
-                  <c:v>216</c:v>
+                  <c:v>219</c:v>
                 </c:pt>
                 <c:pt idx="4">
-                  <c:v>236</c:v>
+                  <c:v>242</c:v>
                 </c:pt>
                 <c:pt idx="5">
-                  <c:v>238</c:v>
+                  <c:v>247</c:v>
                 </c:pt>
                 <c:pt idx="6">
-                  <c:v>258</c:v>
+                  <c:v>267</c:v>
                 </c:pt>
                 <c:pt idx="7">
-                  <c:v>307</c:v>
+                  <c:v>314</c:v>
                 </c:pt>
                 <c:pt idx="8">
-                  <c:v>874</c:v>
+                  <c:v>891</c:v>
                 </c:pt>
                 <c:pt idx="9">
-                  <c:v>913</c:v>
+                  <c:v>939</c:v>
                 </c:pt>
                 <c:pt idx="10">
-                  <c:v>1200</c:v>
+                  <c:v>1265</c:v>
                 </c:pt>
               </c:numCache>
             </c:numRef>
@@ -302,22 +302,22 @@
                   <c:v>宏碁</c:v>
                 </c:pt>
                 <c:pt idx="1">
+                  <c:v>華碩</c:v>
+                </c:pt>
+                <c:pt idx="2">
                   <c:v>戴爾</c:v>
                 </c:pt>
-                <c:pt idx="2">
-                  <c:v>華碩</c:v>
-                </c:pt>
                 <c:pt idx="3">
+                  <c:v>微星</c:v>
+                </c:pt>
+                <c:pt idx="4">
                   <c:v>聯想</c:v>
                 </c:pt>
-                <c:pt idx="4">
-                  <c:v>微星</c:v>
-                </c:pt>
                 <c:pt idx="5">
+                  <c:v>HP</c:v>
+                </c:pt>
+                <c:pt idx="6">
                   <c:v>技嘉</c:v>
-                </c:pt>
-                <c:pt idx="6">
-                  <c:v>HP</c:v>
                 </c:pt>
               </c:strCache>
             </c:strRef>
@@ -329,25 +329,25 @@
                 <c:formatCode>General</c:formatCode>
                 <c:ptCount val="7"/>
                 <c:pt idx="0">
-                  <c:v>36</c:v>
+                  <c:v>39</c:v>
                 </c:pt>
                 <c:pt idx="1">
+                  <c:v>20</c:v>
+                </c:pt>
+                <c:pt idx="2">
                   <c:v>14</c:v>
                 </c:pt>
-                <c:pt idx="2">
-                  <c:v>11</c:v>
-                </c:pt>
                 <c:pt idx="3">
-                  <c:v>11</c:v>
+                  <c:v>13</c:v>
                 </c:pt>
                 <c:pt idx="4">
-                  <c:v>9</c:v>
+                  <c:v>13</c:v>
                 </c:pt>
                 <c:pt idx="5">
-                  <c:v>3</c:v>
+                  <c:v>8</c:v>
                 </c:pt>
                 <c:pt idx="6">
-                  <c:v>3</c:v>
+                  <c:v>6</c:v>
                 </c:pt>
               </c:numCache>
             </c:numRef>
@@ -376,22 +376,22 @@
                   <c:v>宏碁</c:v>
                 </c:pt>
                 <c:pt idx="1">
+                  <c:v>華碩</c:v>
+                </c:pt>
+                <c:pt idx="2">
                   <c:v>戴爾</c:v>
                 </c:pt>
-                <c:pt idx="2">
-                  <c:v>華碩</c:v>
-                </c:pt>
                 <c:pt idx="3">
+                  <c:v>微星</c:v>
+                </c:pt>
+                <c:pt idx="4">
                   <c:v>聯想</c:v>
                 </c:pt>
-                <c:pt idx="4">
-                  <c:v>微星</c:v>
-                </c:pt>
                 <c:pt idx="5">
+                  <c:v>HP</c:v>
+                </c:pt>
+                <c:pt idx="6">
                   <c:v>技嘉</c:v>
-                </c:pt>
-                <c:pt idx="6">
-                  <c:v>HP</c:v>
                 </c:pt>
               </c:strCache>
             </c:strRef>
@@ -406,10 +406,10 @@
                   <c:v>10</c:v>
                 </c:pt>
                 <c:pt idx="1">
+                  <c:v>24</c:v>
+                </c:pt>
+                <c:pt idx="2">
                   <c:v>4</c:v>
-                </c:pt>
-                <c:pt idx="2">
-                  <c:v>24</c:v>
                 </c:pt>
                 <c:pt idx="3">
                   <c:v>7</c:v>
@@ -418,10 +418,10 @@
                   <c:v>7</c:v>
                 </c:pt>
                 <c:pt idx="5">
+                  <c:v>5</c:v>
+                </c:pt>
+                <c:pt idx="6">
                   <c:v>9</c:v>
-                </c:pt>
-                <c:pt idx="6">
-                  <c:v>5</c:v>
                 </c:pt>
               </c:numCache>
             </c:numRef>
@@ -538,22 +538,22 @@
                 <c:formatCode>General</c:formatCode>
                 <c:ptCount val="6"/>
                 <c:pt idx="0">
-                  <c:v>239</c:v>
+                  <c:v>248</c:v>
                 </c:pt>
                 <c:pt idx="1">
-                  <c:v>138</c:v>
+                  <c:v>140</c:v>
                 </c:pt>
                 <c:pt idx="2">
-                  <c:v>97</c:v>
+                  <c:v>105</c:v>
                 </c:pt>
                 <c:pt idx="3">
-                  <c:v>33</c:v>
+                  <c:v>38</c:v>
                 </c:pt>
                 <c:pt idx="4">
                   <c:v>19</c:v>
                 </c:pt>
                 <c:pt idx="5">
-                  <c:v>16</c:v>
+                  <c:v>17</c:v>
                 </c:pt>
               </c:numCache>
             </c:numRef>
@@ -3705,7 +3705,7 @@
           </a:p>
           <a:p>
             <a:r>
-              <a:t>產出:2026-09-07 13:28(台北時間)</a:t>
+              <a:t>產出:2026-09-07 14:43(台北時間)</a:t>
             </a:r>
           </a:p>
           <a:p>
@@ -3773,7 +3773,7 @@
               <a:defRPr sz="1600"/>
             </a:pPr>
             <a:r>
-              <a:t>本期共蒐集 9255 篇公開報導,可歸類 4525 篇</a:t>
+              <a:t>本期共蒐集 9532 篇公開報導,可歸類 4672 篇</a:t>
             </a:r>
           </a:p>
           <a:p>
@@ -3781,7 +3781,7 @@
               <a:defRPr sz="1600"/>
             </a:pPr>
             <a:r>
-              <a:t>高科技製造業:1200 篇(佔可歸類 26.5%)</a:t>
+              <a:t>高科技製造業:1265 篇(佔可歸類 27.1%)</a:t>
             </a:r>
           </a:p>
           <a:p>
@@ -3789,7 +3789,7 @@
               <a:defRPr sz="1600"/>
             </a:pPr>
             <a:r>
-              <a:t>政府教育單位:913 篇(佔可歸類 20.2%)</a:t>
+              <a:t>政府教育單位:939 篇(佔可歸類 20.1%)</a:t>
             </a:r>
           </a:p>
           <a:p>
@@ -3797,7 +3797,7 @@
               <a:defRPr sz="1600"/>
             </a:pPr>
             <a:r>
-              <a:t>金融業:874 篇(佔可歸類 19.3%)</a:t>
+              <a:t>金融業:891 篇(佔可歸類 19.1%)</a:t>
             </a:r>
           </a:p>
           <a:p>
@@ -3805,7 +3805,7 @@
               <a:defRPr sz="1600"/>
             </a:pPr>
             <a:r>
-              <a:t>最熱主題:AI 與自動化(963 篇)、地緣政治與供應鏈(410 篇)、利率與資金環境(352 篇)</a:t>
+              <a:t>最熱主題:AI 與自動化(992 篇)、地緣政治與供應鏈(420 篇)、利率與資金環境(358 篇)</a:t>
             </a:r>
           </a:p>
           <a:p>
@@ -3909,7 +3909,7 @@
           <a:lstStyle/>
           <a:p>
             <a:r>
-              <a:t>競品聲量對比(SOV)— 電腦品牌(合計 87 篇)</a:t>
+              <a:t>競品聲量對比(SOV)— 電腦品牌(合計 113 篇)</a:t>
             </a:r>
           </a:p>
         </p:txBody>
@@ -3966,7 +3966,7 @@
           <a:lstStyle/>
           <a:p>
             <a:r>
-              <a:t>競品聲量對比(SOV)— 半導體(合計 542 篇)</a:t>
+              <a:t>競品聲量對比(SOV)— 半導體(合計 567 篇)</a:t>
             </a:r>
           </a:p>
         </p:txBody>

--- a/docs/reports/台灣產業趨勢監測週報_2026-08-31_2026-09-07.pptx
+++ b/docs/reports/台灣產業趨勢監測週報_2026-08-31_2026-09-07.pptx
@@ -186,34 +186,34 @@
                   <c:v>37</c:v>
                 </c:pt>
                 <c:pt idx="1">
-                  <c:v>99</c:v>
+                  <c:v>104</c:v>
                 </c:pt>
                 <c:pt idx="2">
-                  <c:v>152</c:v>
+                  <c:v>157</c:v>
                 </c:pt>
                 <c:pt idx="3">
-                  <c:v>219</c:v>
+                  <c:v>229</c:v>
                 </c:pt>
                 <c:pt idx="4">
-                  <c:v>242</c:v>
+                  <c:v>256</c:v>
                 </c:pt>
                 <c:pt idx="5">
-                  <c:v>247</c:v>
+                  <c:v>270</c:v>
                 </c:pt>
                 <c:pt idx="6">
-                  <c:v>267</c:v>
+                  <c:v>275</c:v>
                 </c:pt>
                 <c:pt idx="7">
-                  <c:v>314</c:v>
+                  <c:v>327</c:v>
                 </c:pt>
                 <c:pt idx="8">
-                  <c:v>891</c:v>
+                  <c:v>918</c:v>
                 </c:pt>
                 <c:pt idx="9">
-                  <c:v>939</c:v>
+                  <c:v>986</c:v>
                 </c:pt>
                 <c:pt idx="10">
-                  <c:v>1265</c:v>
+                  <c:v>1297</c:v>
                 </c:pt>
               </c:numCache>
             </c:numRef>
@@ -332,7 +332,7 @@
                   <c:v>39</c:v>
                 </c:pt>
                 <c:pt idx="1">
-                  <c:v>20</c:v>
+                  <c:v>21</c:v>
                 </c:pt>
                 <c:pt idx="2">
                   <c:v>14</c:v>
@@ -538,22 +538,22 @@
                 <c:formatCode>General</c:formatCode>
                 <c:ptCount val="6"/>
                 <c:pt idx="0">
-                  <c:v>248</c:v>
+                  <c:v>251</c:v>
                 </c:pt>
                 <c:pt idx="1">
-                  <c:v>140</c:v>
+                  <c:v>143</c:v>
                 </c:pt>
                 <c:pt idx="2">
                   <c:v>105</c:v>
                 </c:pt>
                 <c:pt idx="3">
-                  <c:v>38</c:v>
+                  <c:v>40</c:v>
                 </c:pt>
                 <c:pt idx="4">
-                  <c:v>19</c:v>
+                  <c:v>21</c:v>
                 </c:pt>
                 <c:pt idx="5">
-                  <c:v>17</c:v>
+                  <c:v>18</c:v>
                 </c:pt>
               </c:numCache>
             </c:numRef>
@@ -3705,7 +3705,7 @@
           </a:p>
           <a:p>
             <a:r>
-              <a:t>產出:2026-09-07 14:43(台北時間)</a:t>
+              <a:t>產出:2026-09-07 17:18(台北時間)</a:t>
             </a:r>
           </a:p>
           <a:p>
@@ -3773,7 +3773,7 @@
               <a:defRPr sz="1600"/>
             </a:pPr>
             <a:r>
-              <a:t>本期共蒐集 9532 篇公開報導,可歸類 4672 篇</a:t>
+              <a:t>本期共蒐集 9862 篇公開報導,可歸類 4856 篇</a:t>
             </a:r>
           </a:p>
           <a:p>
@@ -3781,7 +3781,7 @@
               <a:defRPr sz="1600"/>
             </a:pPr>
             <a:r>
-              <a:t>高科技製造業:1265 篇(佔可歸類 27.1%)</a:t>
+              <a:t>高科技製造業:1297 篇(佔可歸類 26.7%)</a:t>
             </a:r>
           </a:p>
           <a:p>
@@ -3789,7 +3789,7 @@
               <a:defRPr sz="1600"/>
             </a:pPr>
             <a:r>
-              <a:t>政府教育單位:939 篇(佔可歸類 20.1%)</a:t>
+              <a:t>政府教育單位:986 篇(佔可歸類 20.3%)</a:t>
             </a:r>
           </a:p>
           <a:p>
@@ -3797,7 +3797,7 @@
               <a:defRPr sz="1600"/>
             </a:pPr>
             <a:r>
-              <a:t>金融業:891 篇(佔可歸類 19.1%)</a:t>
+              <a:t>金融業:918 篇(佔可歸類 18.9%)</a:t>
             </a:r>
           </a:p>
           <a:p>
@@ -3805,7 +3805,7 @@
               <a:defRPr sz="1600"/>
             </a:pPr>
             <a:r>
-              <a:t>最熱主題:AI 與自動化(992 篇)、地緣政治與供應鏈(420 篇)、利率與資金環境(358 篇)</a:t>
+              <a:t>最熱主題:AI 與自動化(1028 篇)、地緣政治與供應鏈(435 篇)、利率與資金環境(367 篇)</a:t>
             </a:r>
           </a:p>
           <a:p>
@@ -3909,7 +3909,7 @@
           <a:lstStyle/>
           <a:p>
             <a:r>
-              <a:t>競品聲量對比(SOV)— 電腦品牌(合計 113 篇)</a:t>
+              <a:t>競品聲量對比(SOV)— 電腦品牌(合計 114 篇)</a:t>
             </a:r>
           </a:p>
         </p:txBody>
@@ -3966,7 +3966,7 @@
           <a:lstStyle/>
           <a:p>
             <a:r>
-              <a:t>競品聲量對比(SOV)— 半導體(合計 567 篇)</a:t>
+              <a:t>競品聲量對比(SOV)— 半導體(合計 578 篇)</a:t>
             </a:r>
           </a:p>
         </p:txBody>
@@ -4063,7 +4063,7 @@
               <a:defRPr sz="1600"/>
             </a:pPr>
             <a:r>
-              <a:t>Google:疑似負面 6 篇(命中:下架、詐騙)</a:t>
+              <a:t>Google:疑似負面 8 篇(命中:下架、裁員、詐騙)</a:t>
             </a:r>
           </a:p>
           <a:p>

--- a/docs/reports/台灣產業趨勢監測週報_2026-08-31_2026-09-07.pptx
+++ b/docs/reports/台灣產業趨勢監測週報_2026-08-31_2026-09-07.pptx
@@ -183,37 +183,37 @@
                 <c:formatCode>General</c:formatCode>
                 <c:ptCount val="11"/>
                 <c:pt idx="0">
-                  <c:v>37</c:v>
+                  <c:v>38</c:v>
                 </c:pt>
                 <c:pt idx="1">
-                  <c:v>104</c:v>
+                  <c:v>109</c:v>
                 </c:pt>
                 <c:pt idx="2">
-                  <c:v>157</c:v>
+                  <c:v>163</c:v>
                 </c:pt>
                 <c:pt idx="3">
-                  <c:v>229</c:v>
+                  <c:v>232</c:v>
                 </c:pt>
                 <c:pt idx="4">
-                  <c:v>256</c:v>
+                  <c:v>269</c:v>
                 </c:pt>
                 <c:pt idx="5">
-                  <c:v>270</c:v>
+                  <c:v>274</c:v>
                 </c:pt>
                 <c:pt idx="6">
-                  <c:v>275</c:v>
+                  <c:v>278</c:v>
                 </c:pt>
                 <c:pt idx="7">
-                  <c:v>327</c:v>
+                  <c:v>346</c:v>
                 </c:pt>
                 <c:pt idx="8">
-                  <c:v>918</c:v>
+                  <c:v>939</c:v>
                 </c:pt>
                 <c:pt idx="9">
-                  <c:v>986</c:v>
+                  <c:v>1004</c:v>
                 </c:pt>
                 <c:pt idx="10">
-                  <c:v>1297</c:v>
+                  <c:v>1332</c:v>
                 </c:pt>
               </c:numCache>
             </c:numRef>
@@ -329,10 +329,10 @@
                 <c:formatCode>General</c:formatCode>
                 <c:ptCount val="7"/>
                 <c:pt idx="0">
-                  <c:v>39</c:v>
+                  <c:v>42</c:v>
                 </c:pt>
                 <c:pt idx="1">
-                  <c:v>21</c:v>
+                  <c:v>23</c:v>
                 </c:pt>
                 <c:pt idx="2">
                   <c:v>14</c:v>
@@ -538,16 +538,16 @@
                 <c:formatCode>General</c:formatCode>
                 <c:ptCount val="6"/>
                 <c:pt idx="0">
-                  <c:v>251</c:v>
+                  <c:v>256</c:v>
                 </c:pt>
                 <c:pt idx="1">
-                  <c:v>143</c:v>
+                  <c:v>145</c:v>
                 </c:pt>
                 <c:pt idx="2">
-                  <c:v>105</c:v>
+                  <c:v>108</c:v>
                 </c:pt>
                 <c:pt idx="3">
-                  <c:v>40</c:v>
+                  <c:v>42</c:v>
                 </c:pt>
                 <c:pt idx="4">
                   <c:v>21</c:v>
@@ -3705,7 +3705,7 @@
           </a:p>
           <a:p>
             <a:r>
-              <a:t>產出:2026-09-07 17:18(台北時間)</a:t>
+              <a:t>產出:2026-09-07 18:43(台北時間)</a:t>
             </a:r>
           </a:p>
           <a:p>
@@ -3773,7 +3773,7 @@
               <a:defRPr sz="1600"/>
             </a:pPr>
             <a:r>
-              <a:t>本期共蒐集 9862 篇公開報導,可歸類 4856 篇</a:t>
+              <a:t>本期共蒐集 10092 篇公開報導,可歸類 4984 篇</a:t>
             </a:r>
           </a:p>
           <a:p>
@@ -3781,7 +3781,7 @@
               <a:defRPr sz="1600"/>
             </a:pPr>
             <a:r>
-              <a:t>高科技製造業:1297 篇(佔可歸類 26.7%)</a:t>
+              <a:t>高科技製造業:1332 篇(佔可歸類 26.7%)</a:t>
             </a:r>
           </a:p>
           <a:p>
@@ -3789,7 +3789,7 @@
               <a:defRPr sz="1600"/>
             </a:pPr>
             <a:r>
-              <a:t>政府教育單位:986 篇(佔可歸類 20.3%)</a:t>
+              <a:t>政府教育單位:1004 篇(佔可歸類 20.1%)</a:t>
             </a:r>
           </a:p>
           <a:p>
@@ -3797,7 +3797,7 @@
               <a:defRPr sz="1600"/>
             </a:pPr>
             <a:r>
-              <a:t>金融業:918 篇(佔可歸類 18.9%)</a:t>
+              <a:t>金融業:939 篇(佔可歸類 18.8%)</a:t>
             </a:r>
           </a:p>
           <a:p>
@@ -3805,7 +3805,7 @@
               <a:defRPr sz="1600"/>
             </a:pPr>
             <a:r>
-              <a:t>最熱主題:AI 與自動化(1028 篇)、地緣政治與供應鏈(435 篇)、利率與資金環境(367 篇)</a:t>
+              <a:t>最熱主題:AI 與自動化(1055 篇)、地緣政治與供應鏈(443 篇)、利率與資金環境(375 篇)</a:t>
             </a:r>
           </a:p>
           <a:p>
@@ -3909,7 +3909,7 @@
           <a:lstStyle/>
           <a:p>
             <a:r>
-              <a:t>競品聲量對比(SOV)— 電腦品牌(合計 114 篇)</a:t>
+              <a:t>競品聲量對比(SOV)— 電腦品牌(合計 119 篇)</a:t>
             </a:r>
           </a:p>
         </p:txBody>
@@ -3966,7 +3966,7 @@
           <a:lstStyle/>
           <a:p>
             <a:r>
-              <a:t>競品聲量對比(SOV)— 半導體(合計 578 篇)</a:t>
+              <a:t>競品聲量對比(SOV)— 半導體(合計 590 篇)</a:t>
             </a:r>
           </a:p>
         </p:txBody>

--- a/docs/reports/台灣產業趨勢監測週報_2026-08-31_2026-09-07.pptx
+++ b/docs/reports/台灣產業趨勢監測週報_2026-08-31_2026-09-07.pptx
@@ -153,10 +153,10 @@
                   <c:v>住宿及餐飲業</c:v>
                 </c:pt>
                 <c:pt idx="4">
+                  <c:v>服務業</c:v>
+                </c:pt>
+                <c:pt idx="5">
                   <c:v>專業科學及技術服務業</c:v>
-                </c:pt>
-                <c:pt idx="5">
-                  <c:v>服務業</c:v>
                 </c:pt>
                 <c:pt idx="6">
                   <c:v>資通訊業</c:v>
@@ -183,37 +183,37 @@
                 <c:formatCode>General</c:formatCode>
                 <c:ptCount val="11"/>
                 <c:pt idx="0">
-                  <c:v>38</c:v>
+                  <c:v>40</c:v>
                 </c:pt>
                 <c:pt idx="1">
-                  <c:v>109</c:v>
+                  <c:v>111</c:v>
                 </c:pt>
                 <c:pt idx="2">
-                  <c:v>163</c:v>
+                  <c:v>168</c:v>
                 </c:pt>
                 <c:pt idx="3">
-                  <c:v>232</c:v>
+                  <c:v>238</c:v>
                 </c:pt>
                 <c:pt idx="4">
-                  <c:v>269</c:v>
+                  <c:v>284</c:v>
                 </c:pt>
                 <c:pt idx="5">
-                  <c:v>274</c:v>
+                  <c:v>284</c:v>
                 </c:pt>
                 <c:pt idx="6">
-                  <c:v>278</c:v>
+                  <c:v>290</c:v>
                 </c:pt>
                 <c:pt idx="7">
-                  <c:v>346</c:v>
+                  <c:v>357</c:v>
                 </c:pt>
                 <c:pt idx="8">
-                  <c:v>939</c:v>
+                  <c:v>950</c:v>
                 </c:pt>
                 <c:pt idx="9">
-                  <c:v>1004</c:v>
+                  <c:v>1025</c:v>
                 </c:pt>
                 <c:pt idx="10">
-                  <c:v>1332</c:v>
+                  <c:v>1365</c:v>
                 </c:pt>
               </c:numCache>
             </c:numRef>
@@ -308,10 +308,10 @@
                   <c:v>戴爾</c:v>
                 </c:pt>
                 <c:pt idx="3">
+                  <c:v>聯想</c:v>
+                </c:pt>
+                <c:pt idx="4">
                   <c:v>微星</c:v>
-                </c:pt>
-                <c:pt idx="4">
-                  <c:v>聯想</c:v>
                 </c:pt>
                 <c:pt idx="5">
                   <c:v>HP</c:v>
@@ -329,16 +329,16 @@
                 <c:formatCode>General</c:formatCode>
                 <c:ptCount val="7"/>
                 <c:pt idx="0">
-                  <c:v>42</c:v>
+                  <c:v>45</c:v>
                 </c:pt>
                 <c:pt idx="1">
                   <c:v>23</c:v>
                 </c:pt>
                 <c:pt idx="2">
+                  <c:v>15</c:v>
+                </c:pt>
+                <c:pt idx="3">
                   <c:v>14</c:v>
-                </c:pt>
-                <c:pt idx="3">
-                  <c:v>13</c:v>
                 </c:pt>
                 <c:pt idx="4">
                   <c:v>13</c:v>
@@ -347,7 +347,7 @@
                   <c:v>8</c:v>
                 </c:pt>
                 <c:pt idx="6">
-                  <c:v>6</c:v>
+                  <c:v>7</c:v>
                 </c:pt>
               </c:numCache>
             </c:numRef>
@@ -382,10 +382,10 @@
                   <c:v>戴爾</c:v>
                 </c:pt>
                 <c:pt idx="3">
+                  <c:v>聯想</c:v>
+                </c:pt>
+                <c:pt idx="4">
                   <c:v>微星</c:v>
-                </c:pt>
-                <c:pt idx="4">
-                  <c:v>聯想</c:v>
                 </c:pt>
                 <c:pt idx="5">
                   <c:v>HP</c:v>
@@ -538,16 +538,16 @@
                 <c:formatCode>General</c:formatCode>
                 <c:ptCount val="6"/>
                 <c:pt idx="0">
-                  <c:v>256</c:v>
+                  <c:v>260</c:v>
                 </c:pt>
                 <c:pt idx="1">
-                  <c:v>145</c:v>
+                  <c:v>147</c:v>
                 </c:pt>
                 <c:pt idx="2">
-                  <c:v>108</c:v>
+                  <c:v>109</c:v>
                 </c:pt>
                 <c:pt idx="3">
-                  <c:v>42</c:v>
+                  <c:v>46</c:v>
                 </c:pt>
                 <c:pt idx="4">
                   <c:v>21</c:v>
@@ -3705,7 +3705,7 @@
           </a:p>
           <a:p>
             <a:r>
-              <a:t>產出:2026-09-07 18:43(台北時間)</a:t>
+              <a:t>產出:2026-09-07 23:17(台北時間)</a:t>
             </a:r>
           </a:p>
           <a:p>
@@ -3773,7 +3773,7 @@
               <a:defRPr sz="1600"/>
             </a:pPr>
             <a:r>
-              <a:t>本期共蒐集 10092 篇公開報導,可歸類 4984 篇</a:t>
+              <a:t>本期共蒐集 10434 篇公開報導,可歸類 5112 篇</a:t>
             </a:r>
           </a:p>
           <a:p>
@@ -3781,7 +3781,7 @@
               <a:defRPr sz="1600"/>
             </a:pPr>
             <a:r>
-              <a:t>高科技製造業:1332 篇(佔可歸類 26.7%)</a:t>
+              <a:t>高科技製造業:1365 篇(佔可歸類 26.7%)</a:t>
             </a:r>
           </a:p>
           <a:p>
@@ -3789,7 +3789,7 @@
               <a:defRPr sz="1600"/>
             </a:pPr>
             <a:r>
-              <a:t>政府教育單位:1004 篇(佔可歸類 20.1%)</a:t>
+              <a:t>政府教育單位:1025 篇(佔可歸類 20.1%)</a:t>
             </a:r>
           </a:p>
           <a:p>
@@ -3797,7 +3797,7 @@
               <a:defRPr sz="1600"/>
             </a:pPr>
             <a:r>
-              <a:t>金融業:939 篇(佔可歸類 18.8%)</a:t>
+              <a:t>金融業:950 篇(佔可歸類 18.6%)</a:t>
             </a:r>
           </a:p>
           <a:p>
@@ -3805,7 +3805,7 @@
               <a:defRPr sz="1600"/>
             </a:pPr>
             <a:r>
-              <a:t>最熱主題:AI 與自動化(1055 篇)、地緣政治與供應鏈(443 篇)、利率與資金環境(375 篇)</a:t>
+              <a:t>最熱主題:AI 與自動化(1089 篇)、地緣政治與供應鏈(449 篇)、利率與資金環境(380 篇)</a:t>
             </a:r>
           </a:p>
           <a:p>
@@ -3909,7 +3909,7 @@
           <a:lstStyle/>
           <a:p>
             <a:r>
-              <a:t>競品聲量對比(SOV)— 電腦品牌(合計 119 篇)</a:t>
+              <a:t>競品聲量對比(SOV)— 電腦品牌(合計 125 篇)</a:t>
             </a:r>
           </a:p>
         </p:txBody>
@@ -3966,7 +3966,7 @@
           <a:lstStyle/>
           <a:p>
             <a:r>
-              <a:t>競品聲量對比(SOV)— 半導體(合計 590 篇)</a:t>
+              <a:t>競品聲量對比(SOV)— 半導體(合計 601 篇)</a:t>
             </a:r>
           </a:p>
         </p:txBody>
@@ -4047,7 +4047,7 @@
               <a:defRPr sz="1600"/>
             </a:pPr>
             <a:r>
-              <a:t>Meta:疑似負面 14 篇(命中:下架、判賠、求償、罰鍰)</a:t>
+              <a:t>Meta:疑似負面 15 篇(命中:下架、判賠、求償、罰鍰)</a:t>
             </a:r>
           </a:p>
           <a:p>
@@ -4063,7 +4063,7 @@
               <a:defRPr sz="1600"/>
             </a:pPr>
             <a:r>
-              <a:t>Google:疑似負面 8 篇(命中:下架、裁員、詐騙)</a:t>
+              <a:t>Google:疑似負面 9 篇(命中:下架、裁員、詐騙)</a:t>
             </a:r>
           </a:p>
           <a:p>
@@ -4079,7 +4079,7 @@
               <a:defRPr sz="1600"/>
             </a:pPr>
             <a:r>
-              <a:t>中華電信:疑似負面 2 篇(命中:工安、爆炸)</a:t>
+              <a:t>蘋果:疑似負面 2 篇(命中:下架、求償、起訴)</a:t>
             </a:r>
           </a:p>
           <a:p>
@@ -4087,7 +4087,7 @@
               <a:defRPr sz="1600"/>
             </a:pPr>
             <a:r>
-              <a:t>全聯:疑似負面 2 篇(命中:下架)</a:t>
+              <a:t>中華電信:疑似負面 2 篇(命中:工安、爆炸)</a:t>
             </a:r>
           </a:p>
           <a:p>
@@ -4095,7 +4095,7 @@
               <a:defRPr sz="1600"/>
             </a:pPr>
             <a:r>
-              <a:t>台積電:疑似負面 2 篇(命中:下架、掏空、詐騙)</a:t>
+              <a:t>全聯:疑似負面 2 篇(命中:下架)</a:t>
             </a:r>
           </a:p>
           <a:p>
@@ -4103,7 +4103,7 @@
               <a:defRPr sz="1600"/>
             </a:pPr>
             <a:r>
-              <a:t>國泰金:疑似負面 2 篇(命中:裁罰、詐欺)</a:t>
+              <a:t>台積電:疑似負面 2 篇(命中:下架、掏空、詐騙)</a:t>
             </a:r>
           </a:p>
           <a:p>
